--- a/materiaal/h3-sociale-verhoudingen.pptx
+++ b/materiaal/h3-sociale-verhoudingen.pptx
@@ -10255,7 +10255,7 @@
                   <a:srgbClr val="FFFFFF"/>
                 </a:solidFill>
               </a:rPr>
-              <a:t>Werkloosheid (640.000 mensen 25% v.d. bevolking)</a:t>
+              <a:t>Werkloosheid (1935: gemiddeld ongeveer 430.000 mensen)</a:t>
             </a:r>
           </a:p>
           <a:p>
